--- a/docs/proposals/softbank-ultraman-caravan/ウルトラマンIP導入のご提案_統合版.pptx
+++ b/docs/proposals/softbank-ultraman-caravan/ウルトラマンIP導入のご提案_統合版.pptx
@@ -12272,7 +12272,7 @@
                 <a:latin typeface="Meiryo"/>
                 <a:ea typeface="Meiryo"/>
               </a:rPr>
-              <a:t>貴社資料の実績数量・単価(キット構成、ノベルティ4,000セット前提)に基づく参考試算です</a:t>
+              <a:t>キット数は貴社ご提示の800キット、その他は貴社資料の前提に基づく試算です</a:t>
             </a:r>
           </a:p>
         </p:txBody>
@@ -12576,7 +12576,7 @@
                           <a:latin typeface="Meiryo"/>
                           <a:ea typeface="Meiryo"/>
                         </a:rPr>
-                        <a:t>約500キット(週400開催の同時稼働+予備・更新分)</a:t>
+                        <a:t>800キット(貴社ご提示の数量)</a:t>
                       </a:r>
                     </a:p>
                   </a:txBody>
@@ -12622,7 +12622,7 @@
                           <a:latin typeface="Meiryo"/>
                           <a:ea typeface="Meiryo"/>
                         </a:rPr>
-                        <a:t>約7,800万円</a:t>
+                        <a:t>約1億2,400万円</a:t>
                       </a:r>
                     </a:p>
                   </a:txBody>
@@ -12645,7 +12645,7 @@
                           <a:latin typeface="Meiryo"/>
                           <a:ea typeface="Meiryo"/>
                         </a:rPr>
-                        <a:t>約1,560万円</a:t>
+                        <a:t>約2,480万円</a:t>
                       </a:r>
                     </a:p>
                   </a:txBody>
@@ -12973,7 +12973,7 @@
                           <a:latin typeface="Meiryo"/>
                           <a:ea typeface="Meiryo"/>
                         </a:rPr>
-                        <a:t>約1.3億円</a:t>
+                        <a:t>約1.8億円</a:t>
                       </a:r>
                     </a:p>
                   </a:txBody>
@@ -12996,7 +12996,7 @@
                           <a:latin typeface="Meiryo"/>
                           <a:ea typeface="Meiryo"/>
                         </a:rPr>
-                        <a:t>約2,660万円</a:t>
+                        <a:t>約3,570万円</a:t>
                       </a:r>
                     </a:p>
                   </a:txBody>
@@ -13063,7 +13063,7 @@
                 <a:latin typeface="Meiryo"/>
                 <a:ea typeface="Meiryo"/>
               </a:rPr>
-              <a:t>※キット数は「週平均400開催の同時稼働に必要な流通数+消耗・デザイン更新分」として設定しています。</a:t>
+              <a:t>※キット数は貴社ご提示の800キットを反映しています。ノベルティ・訴求ツールは貴社資料の前提に基づく想定値です。</a:t>
             </a:r>
           </a:p>
         </p:txBody>
@@ -13770,7 +13770,7 @@
                           <a:latin typeface="Meiryo"/>
                           <a:ea typeface="Meiryo"/>
                         </a:rPr>
-                        <a:t>キット約500・ノベルティ4,000セット・訴求ツール約3,000店×2回</a:t>
+                        <a:t>キット800・ノベルティ4,000セット・訴求ツール約3,000店×2回</a:t>
                       </a:r>
                     </a:p>
                   </a:txBody>
@@ -13793,7 +13793,7 @@
                           <a:latin typeface="Meiryo"/>
                           <a:ea typeface="Meiryo"/>
                         </a:rPr>
-                        <a:t>約2,660万円(従量)</a:t>
+                        <a:t>約3,570万円(従量)</a:t>
                       </a:r>
                     </a:p>
                   </a:txBody>
@@ -13887,7 +13887,7 @@
                           <a:latin typeface="Meiryo"/>
                           <a:ea typeface="Meiryo"/>
                         </a:rPr>
-                        <a:t>約1.66億円</a:t>
+                        <a:t>約1.76億円</a:t>
                       </a:r>
                     </a:p>
                   </a:txBody>

--- a/docs/proposals/softbank-ultraman-caravan/ウルトラマンIP導入のご提案_統合版.pptx
+++ b/docs/proposals/softbank-ultraman-caravan/ウルトラマンIP導入のご提案_統合版.pptx
@@ -12272,7 +12272,7 @@
                 <a:latin typeface="Meiryo"/>
                 <a:ea typeface="Meiryo"/>
               </a:rPr>
-              <a:t>キット数は貴社ご提示の800キット、その他は貴社資料の前提に基づく試算です</a:t>
+              <a:t>キット800式・ノベルティ約2.1万セット(FY25ご実績)に基づく試算です</a:t>
             </a:r>
           </a:p>
         </p:txBody>
@@ -12693,7 +12693,7 @@
                           <a:latin typeface="Meiryo"/>
                           <a:ea typeface="Meiryo"/>
                         </a:rPr>
-                        <a:t>4,000セット(1セット=A〜D賞+参加賞327個、計約130万個)</a:t>
+                        <a:t>約2.1万セット/年(FY25ご実績:約569万個)</a:t>
                       </a:r>
                     </a:p>
                   </a:txBody>
@@ -12716,7 +12716,7 @@
                           <a:latin typeface="Meiryo"/>
                           <a:ea typeface="Meiryo"/>
                         </a:rPr>
-                        <a:t>約9,900円/セット</a:t>
+                        <a:t>約8,800円/セット(実績)</a:t>
                       </a:r>
                     </a:p>
                   </a:txBody>
@@ -12739,7 +12739,7 @@
                           <a:latin typeface="Meiryo"/>
                           <a:ea typeface="Meiryo"/>
                         </a:rPr>
-                        <a:t>約4,000万円</a:t>
+                        <a:t>約1億8,500万円</a:t>
                       </a:r>
                     </a:p>
                   </a:txBody>
@@ -12762,7 +12762,7 @@
                           <a:latin typeface="Meiryo"/>
                           <a:ea typeface="Meiryo"/>
                         </a:rPr>
-                        <a:t>約800万円</a:t>
+                        <a:t>約3,700万円</a:t>
                       </a:r>
                     </a:p>
                   </a:txBody>
@@ -12973,7 +12973,7 @@
                           <a:latin typeface="Meiryo"/>
                           <a:ea typeface="Meiryo"/>
                         </a:rPr>
-                        <a:t>約1.8億円</a:t>
+                        <a:t>約3.2億円</a:t>
                       </a:r>
                     </a:p>
                   </a:txBody>
@@ -12996,7 +12996,7 @@
                           <a:latin typeface="Meiryo"/>
                           <a:ea typeface="Meiryo"/>
                         </a:rPr>
-                        <a:t>約3,570万円</a:t>
+                        <a:t>約6,480万円</a:t>
                       </a:r>
                     </a:p>
                   </a:txBody>
@@ -13063,7 +13063,7 @@
                 <a:latin typeface="Meiryo"/>
                 <a:ea typeface="Meiryo"/>
               </a:rPr>
-              <a:t>※キット数は貴社ご提示の800キットを反映しています。ノベルティ・訴求ツールは貴社資料の前提に基づく想定値です。</a:t>
+              <a:t>※キット数は貴社ご提示の800式、ノベルティはFY25ご実績(作成費約1.85億円)を反映。店頭訴求ツールは実績数ご共有後に精緻化します。</a:t>
             </a:r>
           </a:p>
         </p:txBody>
@@ -13770,7 +13770,7 @@
                           <a:latin typeface="Meiryo"/>
                           <a:ea typeface="Meiryo"/>
                         </a:rPr>
-                        <a:t>キット800・ノベルティ4,000セット・訴求ツール約3,000店×2回</a:t>
+                        <a:t>キット800式・ノベルティ約2.1万セット(実績)・訴求ツール</a:t>
                       </a:r>
                     </a:p>
                   </a:txBody>
@@ -13793,7 +13793,7 @@
                           <a:latin typeface="Meiryo"/>
                           <a:ea typeface="Meiryo"/>
                         </a:rPr>
-                        <a:t>約3,570万円(従量)</a:t>
+                        <a:t>約6,480万円(従量)</a:t>
                       </a:r>
                     </a:p>
                   </a:txBody>
@@ -13887,7 +13887,7 @@
                           <a:latin typeface="Meiryo"/>
                           <a:ea typeface="Meiryo"/>
                         </a:rPr>
-                        <a:t>約1.76億円</a:t>
+                        <a:t>約2.05億円</a:t>
                       </a:r>
                     </a:p>
                   </a:txBody>

--- a/docs/proposals/softbank-ultraman-caravan/ウルトラマンIP導入のご提案_統合版.pptx
+++ b/docs/proposals/softbank-ultraman-caravan/ウルトラマンIP導入のご提案_統合版.pptx
@@ -13063,7 +13063,7 @@
                 <a:latin typeface="Meiryo"/>
                 <a:ea typeface="Meiryo"/>
               </a:rPr>
-              <a:t>※キット数は貴社ご提示の800式、ノベルティはFY25ご実績(作成費約1.85億円)を反映。店頭訴求ツールは実績数ご共有後に精緻化します。</a:t>
+              <a:t>※キット数は貴社ご提示の800式、ノベルティはFY25ご実績(作成費約1.85億円)を反映。店頭訴求ツールは作成数実績(年間約23.5万部)を受領済み・作成費実額のご共有後に精緻化します。</a:t>
             </a:r>
           </a:p>
         </p:txBody>

--- a/docs/proposals/softbank-ultraman-caravan/ウルトラマンIP導入のご提案_統合版.pptx
+++ b/docs/proposals/softbank-ultraman-caravan/ウルトラマンIP導入のご提案_統合版.pptx
@@ -13046,7 +13046,7 @@
                 <a:latin typeface="Meiryo"/>
                 <a:ea typeface="Meiryo"/>
               </a:rPr>
-              <a:t>※数量・単価は貴社資料(現行IP実績のキット構成・単価、ノベルティ4,000セット時の単価前提)に基づく参考値です。実際の作成計画に応じて変動し、お支払いは作成実績ベースの従量となります。</a:t>
+              <a:t>※キットの数量・単価は貴社資料、ノベルティはFY25ご実績(年約2.1万セット・平均約8,800円/セット)に基づく参考値です。実際の作成計画に応じて変動し、お支払いは作成実績ベースの従量となります。</a:t>
             </a:r>
           </a:p>
           <a:p>
